--- a/public/fun/pack/pptx/familypro/가족소개프리미엄_39_나혼자·1인가구_미드나잇실버.pptx
+++ b/public/fun/pack/pptx/familypro/가족소개프리미엄_39_나혼자·1인가구_미드나잇실버.pptx
@@ -113,12 +113,12 @@
   <p:extLst>
     <p:ext uri="{521415D9-36F7-43E2-AB2F-B90AF26B5E84}">
       <p14:sectionLst xmlns:p14="http://schemas.microsoft.com/office/powerpoint/2010/main">
-        <p14:section name="시작" id="{59BB163B-668E-42F6-B759-4EFDC7F3AF88}">
+        <p14:section name="시작" id="{65574E29-6DD1-4CDF-B946-1A01C559581D}">
           <p14:sldIdLst>
             <p14:sldId id="256"/>
           </p14:sldIdLst>
         </p14:section>
-        <p14:section name="본문" id="{D62E9609-2AF5-41F5-BA2C-0EE350916E8A}">
+        <p14:section name="본문" id="{E1367A11-DD42-4466-A0AD-E257052FE408}">
           <p14:sldIdLst>
             <p14:sldId id="257"/>
             <p14:sldId id="258"/>
@@ -127,7 +127,7 @@
             <p14:sldId id="261"/>
           </p14:sldIdLst>
         </p14:section>
-        <p14:section name="마무리" id="{C56C9B32-1A94-4CBD-B1C0-9E3491541BCD}">
+        <p14:section name="마무리" id="{FB44C135-5278-467E-B497-47B22BEBB79F}">
           <p14:sldIdLst>
             <p14:sldId id="262"/>
           </p14:sldIdLst>
@@ -1536,7 +1536,7 @@
             </a:lvl1pPr>
           </a:lstStyle>
           <a:p>
-            <a:fld id="{57C5EAE9-F8B4-4284-B3A5-583912A5EF70}" type="slidenum">
+            <a:fld id="{471FDD69-2745-414C-AC01-36116B77C25D}" type="slidenum">
               <a:rPr lang="en-US"/>
               <a:t>‹#›</a:t>
             </a:fld>
@@ -2161,7 +2161,7 @@
             </a:lvl1pPr>
           </a:lstStyle>
           <a:p>
-            <a:fld id="{93BD7B72-56A6-4585-9D93-6E271D86DED7}" type="slidenum">
+            <a:fld id="{990F8F38-BF81-440C-9719-EE83696ACE6C}" type="slidenum">
               <a:rPr lang="en-US"/>
               <a:t>‹#›</a:t>
             </a:fld>
@@ -2790,7 +2790,7 @@
             </a:lvl1pPr>
           </a:lstStyle>
           <a:p>
-            <a:fld id="{6ACDC9FC-C21E-49B9-901C-C5EE6F8B9E09}" type="slidenum">
+            <a:fld id="{45A044C6-6F24-4DA7-B0C8-7F9FF4BEA8EF}" type="slidenum">
               <a:rPr lang="en-US"/>
               <a:t>‹#›</a:t>
             </a:fld>
@@ -3621,7 +3621,7 @@
           <a:p>
             <a:r>
               <a:rPr lang="ko-KR"/>
-              <a:t>첫눈 온다고 창가에 혼자</a:t>
+              <a:t>하얀 아침을 창가에서 혼자</a:t>
             </a:r>
           </a:p>
         </p:txBody>
@@ -3643,7 +3643,7 @@
           <a:p>
             <a:r>
               <a:rPr lang="ko-KR"/>
-              <a:t>나 혼자 · 1인 가구 · 0000. 00. 00</a:t>
+              <a:t>나 혼자 · 1인 가구 · 날짜 입력</a:t>
             </a:r>
           </a:p>
         </p:txBody>
@@ -3950,7 +3950,7 @@
           <a:bodyPr/>
           <a:lstStyle/>
           <a:p>
-            <a:fld id="{69948492-9D3A-4E5D-BB62-05A73F7ADB9B}" type="slidenum">
+            <a:fld id="{BBB43350-8EF5-4281-983C-31DECA806A9C}" type="slidenum">
               <a:rPr lang="en-US"/>
               <a:t>‹#›</a:t>
             </a:fld>
@@ -4506,7 +4506,7 @@
           <a:bodyPr/>
           <a:lstStyle/>
           <a:p>
-            <a:fld id="{D401B895-1B16-43A2-9C6E-59DDC5821A09}" type="slidenum">
+            <a:fld id="{AF05E98F-1CCD-4961-BDDC-C0A7B7BA7E45}" type="slidenum">
               <a:rPr lang="en-US"/>
               <a:t>‹#›</a:t>
             </a:fld>
@@ -5348,7 +5348,7 @@
           <a:bodyPr/>
           <a:lstStyle/>
           <a:p>
-            <a:fld id="{1D2F7E45-5CAA-48CD-BA15-3E2F51CFE790}" type="slidenum">
+            <a:fld id="{0D670408-230A-4157-AF56-A97B87B1355C}" type="slidenum">
               <a:rPr lang="en-US"/>
               <a:t>‹#›</a:t>
             </a:fld>
@@ -6597,7 +6597,7 @@
           <a:bodyPr/>
           <a:lstStyle/>
           <a:p>
-            <a:fld id="{C1E6BD1B-37BD-48D7-86F4-B51F5C73F7F3}" type="slidenum">
+            <a:fld id="{CDA4118D-FF53-481F-8F8C-703C9A8E01AF}" type="slidenum">
               <a:rPr lang="en-US"/>
               <a:t>‹#›</a:t>
             </a:fld>
@@ -6685,7 +6685,7 @@
           <a:bodyPr/>
           <a:lstStyle/>
           <a:p>
-            <a:fld id="{151527C8-0D72-4D40-9411-6EFA817B8937}" type="slidenum">
+            <a:fld id="{04B7DE16-CC01-4F71-8BCF-6A9C9AF5BBA2}" type="slidenum">
               <a:rPr lang="en-US"/>
               <a:t>‹#›</a:t>
             </a:fld>
